--- a/livro_ia_educacao/saida/pptx/Cap26_slides.pptx
+++ b/livro_ia_educacao/saida/pptx/Cap26_slides.pptx
@@ -9031,11 +9031,11 @@
         <p:spPr>
           <a:xfrm>
             <a:off x="548640" y="1417320"/>
-            <a:ext cx="11064240" cy="762000"/>
+            <a:ext cx="11064240" cy="682752"/>
           </a:xfrm>
           <a:prstGeom prst="roundRect">
             <a:avLst>
-              <a:gd name="adj" fmla="val 14400"/>
+              <a:gd name="adj" fmla="val 16071"/>
             </a:avLst>
           </a:prstGeom>
           <a:solidFill>
@@ -9062,7 +9062,7 @@
         <p:spPr>
           <a:xfrm>
             <a:off x="731520" y="1417320"/>
-            <a:ext cx="548640" cy="762000"/>
+            <a:ext cx="548640" cy="682752"/>
           </a:xfrm>
           <a:prstGeom prst="rect">
             <a:avLst/>
@@ -9098,7 +9098,7 @@
         <p:spPr>
           <a:xfrm>
             <a:off x="1463040" y="1417320"/>
-            <a:ext cx="9966960" cy="762000"/>
+            <a:ext cx="9966960" cy="682752"/>
           </a:xfrm>
           <a:prstGeom prst="rect">
             <a:avLst/>
@@ -9133,12 +9133,12 @@
         </p:nvSpPr>
         <p:spPr>
           <a:xfrm>
-            <a:off x="548640" y="2289048"/>
-            <a:ext cx="11064240" cy="762000"/>
+            <a:off x="548640" y="2209800"/>
+            <a:ext cx="11064240" cy="682752"/>
           </a:xfrm>
           <a:prstGeom prst="roundRect">
             <a:avLst>
-              <a:gd name="adj" fmla="val 14400"/>
+              <a:gd name="adj" fmla="val 16071"/>
             </a:avLst>
           </a:prstGeom>
           <a:solidFill>
@@ -9164,8 +9164,8 @@
         </p:nvSpPr>
         <p:spPr>
           <a:xfrm>
-            <a:off x="731520" y="2289048"/>
-            <a:ext cx="548640" cy="762000"/>
+            <a:off x="731520" y="2209800"/>
+            <a:ext cx="548640" cy="682752"/>
           </a:xfrm>
           <a:prstGeom prst="rect">
             <a:avLst/>
@@ -9200,8 +9200,8 @@
         </p:nvSpPr>
         <p:spPr>
           <a:xfrm>
-            <a:off x="1463040" y="2289048"/>
-            <a:ext cx="9966960" cy="762000"/>
+            <a:off x="1463040" y="2209800"/>
+            <a:ext cx="9966960" cy="682752"/>
           </a:xfrm>
           <a:prstGeom prst="rect">
             <a:avLst/>
@@ -9236,12 +9236,12 @@
         </p:nvSpPr>
         <p:spPr>
           <a:xfrm>
-            <a:off x="548640" y="3160776"/>
-            <a:ext cx="11064240" cy="762000"/>
+            <a:off x="548640" y="3002280"/>
+            <a:ext cx="11064240" cy="682752"/>
           </a:xfrm>
           <a:prstGeom prst="roundRect">
             <a:avLst>
-              <a:gd name="adj" fmla="val 14400"/>
+              <a:gd name="adj" fmla="val 16071"/>
             </a:avLst>
           </a:prstGeom>
           <a:solidFill>
@@ -9267,8 +9267,8 @@
         </p:nvSpPr>
         <p:spPr>
           <a:xfrm>
-            <a:off x="731520" y="3160776"/>
-            <a:ext cx="548640" cy="762000"/>
+            <a:off x="731520" y="3002280"/>
+            <a:ext cx="548640" cy="682752"/>
           </a:xfrm>
           <a:prstGeom prst="rect">
             <a:avLst/>
@@ -9303,8 +9303,8 @@
         </p:nvSpPr>
         <p:spPr>
           <a:xfrm>
-            <a:off x="1463040" y="3160776"/>
-            <a:ext cx="9966960" cy="762000"/>
+            <a:off x="1463040" y="3002280"/>
+            <a:ext cx="9966960" cy="682752"/>
           </a:xfrm>
           <a:prstGeom prst="rect">
             <a:avLst/>
@@ -9339,12 +9339,12 @@
         </p:nvSpPr>
         <p:spPr>
           <a:xfrm>
-            <a:off x="548640" y="4032504"/>
-            <a:ext cx="11064240" cy="762000"/>
+            <a:off x="548640" y="3794760"/>
+            <a:ext cx="11064240" cy="682752"/>
           </a:xfrm>
           <a:prstGeom prst="roundRect">
             <a:avLst>
-              <a:gd name="adj" fmla="val 14400"/>
+              <a:gd name="adj" fmla="val 16071"/>
             </a:avLst>
           </a:prstGeom>
           <a:solidFill>
@@ -9370,8 +9370,8 @@
         </p:nvSpPr>
         <p:spPr>
           <a:xfrm>
-            <a:off x="731520" y="4032504"/>
-            <a:ext cx="548640" cy="762000"/>
+            <a:off x="731520" y="3794760"/>
+            <a:ext cx="548640" cy="682752"/>
           </a:xfrm>
           <a:prstGeom prst="rect">
             <a:avLst/>
@@ -9406,8 +9406,8 @@
         </p:nvSpPr>
         <p:spPr>
           <a:xfrm>
-            <a:off x="1463040" y="4032504"/>
-            <a:ext cx="9966960" cy="762000"/>
+            <a:off x="1463040" y="3794760"/>
+            <a:ext cx="9966960" cy="682752"/>
           </a:xfrm>
           <a:prstGeom prst="rect">
             <a:avLst/>
@@ -9442,12 +9442,12 @@
         </p:nvSpPr>
         <p:spPr>
           <a:xfrm>
-            <a:off x="548640" y="4904232"/>
-            <a:ext cx="11064240" cy="762000"/>
+            <a:off x="548640" y="4587240"/>
+            <a:ext cx="11064240" cy="682752"/>
           </a:xfrm>
           <a:prstGeom prst="roundRect">
             <a:avLst>
-              <a:gd name="adj" fmla="val 14400"/>
+              <a:gd name="adj" fmla="val 16071"/>
             </a:avLst>
           </a:prstGeom>
           <a:solidFill>
@@ -9473,8 +9473,8 @@
         </p:nvSpPr>
         <p:spPr>
           <a:xfrm>
-            <a:off x="731520" y="4904232"/>
-            <a:ext cx="548640" cy="762000"/>
+            <a:off x="731520" y="4587240"/>
+            <a:ext cx="548640" cy="682752"/>
           </a:xfrm>
           <a:prstGeom prst="rect">
             <a:avLst/>
@@ -9509,8 +9509,8 @@
         </p:nvSpPr>
         <p:spPr>
           <a:xfrm>
-            <a:off x="1463040" y="4904232"/>
-            <a:ext cx="9966960" cy="762000"/>
+            <a:off x="1463040" y="4587240"/>
+            <a:ext cx="9966960" cy="682752"/>
           </a:xfrm>
           <a:prstGeom prst="rect">
             <a:avLst/>
@@ -9545,12 +9545,12 @@
         </p:nvSpPr>
         <p:spPr>
           <a:xfrm>
-            <a:off x="548640" y="5775960"/>
-            <a:ext cx="11064240" cy="762000"/>
+            <a:off x="548640" y="5379720"/>
+            <a:ext cx="11064240" cy="682752"/>
           </a:xfrm>
           <a:prstGeom prst="roundRect">
             <a:avLst>
-              <a:gd name="adj" fmla="val 14400"/>
+              <a:gd name="adj" fmla="val 16071"/>
             </a:avLst>
           </a:prstGeom>
           <a:solidFill>
@@ -9576,8 +9576,8 @@
         </p:nvSpPr>
         <p:spPr>
           <a:xfrm>
-            <a:off x="731520" y="5775960"/>
-            <a:ext cx="548640" cy="762000"/>
+            <a:off x="731520" y="5379720"/>
+            <a:ext cx="548640" cy="682752"/>
           </a:xfrm>
           <a:prstGeom prst="rect">
             <a:avLst/>
@@ -9612,8 +9612,8 @@
         </p:nvSpPr>
         <p:spPr>
           <a:xfrm>
-            <a:off x="1463040" y="5775960"/>
-            <a:ext cx="9966960" cy="762000"/>
+            <a:off x="1463040" y="5379720"/>
+            <a:ext cx="9966960" cy="682752"/>
           </a:xfrm>
           <a:prstGeom prst="rect">
             <a:avLst/>
